--- a/audiovisual-presentacion/presentacion-ingreso-EyP-2026-09.pptx
+++ b/audiovisual-presentacion/presentacion-ingreso-EyP-2026-09.pptx
@@ -213,7 +213,7 @@
           <a:p>
             <a:fld id="{EF9B9E6D-A3CC-4055-8656-74FF51DB7AFF}" type="datetimeFigureOut">
               <a:rPr lang="en-US" smtClean="0"/>
-              <a:t>9/28/2026</a:t>
+              <a:t>9/30/2026</a:t>
             </a:fld>
             <a:endParaRPr lang="en-US"/>
           </a:p>
@@ -2124,7 +2124,7 @@
           <a:p>
             <a:fld id="{778AC457-5DEC-4184-8EEA-AE743BF09E6E}" type="datetimeFigureOut">
               <a:rPr lang="en-US" smtClean="0"/>
-              <a:t>9/28/2026</a:t>
+              <a:t>9/30/2026</a:t>
             </a:fld>
             <a:endParaRPr lang="en-US"/>
           </a:p>
@@ -2324,7 +2324,7 @@
           <a:p>
             <a:fld id="{778AC457-5DEC-4184-8EEA-AE743BF09E6E}" type="datetimeFigureOut">
               <a:rPr lang="en-US" smtClean="0"/>
-              <a:t>9/28/2026</a:t>
+              <a:t>9/30/2026</a:t>
             </a:fld>
             <a:endParaRPr lang="en-US"/>
           </a:p>
@@ -2534,7 +2534,7 @@
           <a:p>
             <a:fld id="{778AC457-5DEC-4184-8EEA-AE743BF09E6E}" type="datetimeFigureOut">
               <a:rPr lang="en-US" smtClean="0"/>
-              <a:t>9/28/2026</a:t>
+              <a:t>9/30/2026</a:t>
             </a:fld>
             <a:endParaRPr lang="en-US"/>
           </a:p>
@@ -2734,7 +2734,7 @@
           <a:p>
             <a:fld id="{778AC457-5DEC-4184-8EEA-AE743BF09E6E}" type="datetimeFigureOut">
               <a:rPr lang="en-US" smtClean="0"/>
-              <a:t>9/28/2026</a:t>
+              <a:t>9/30/2026</a:t>
             </a:fld>
             <a:endParaRPr lang="en-US"/>
           </a:p>
@@ -3010,7 +3010,7 @@
           <a:p>
             <a:fld id="{778AC457-5DEC-4184-8EEA-AE743BF09E6E}" type="datetimeFigureOut">
               <a:rPr lang="en-US" smtClean="0"/>
-              <a:t>9/28/2026</a:t>
+              <a:t>9/30/2026</a:t>
             </a:fld>
             <a:endParaRPr lang="en-US"/>
           </a:p>
@@ -3278,7 +3278,7 @@
           <a:p>
             <a:fld id="{778AC457-5DEC-4184-8EEA-AE743BF09E6E}" type="datetimeFigureOut">
               <a:rPr lang="en-US" smtClean="0"/>
-              <a:t>9/28/2026</a:t>
+              <a:t>9/30/2026</a:t>
             </a:fld>
             <a:endParaRPr lang="en-US"/>
           </a:p>
@@ -3693,7 +3693,7 @@
           <a:p>
             <a:fld id="{778AC457-5DEC-4184-8EEA-AE743BF09E6E}" type="datetimeFigureOut">
               <a:rPr lang="en-US" smtClean="0"/>
-              <a:t>9/28/2026</a:t>
+              <a:t>9/30/2026</a:t>
             </a:fld>
             <a:endParaRPr lang="en-US"/>
           </a:p>
@@ -3835,7 +3835,7 @@
           <a:p>
             <a:fld id="{778AC457-5DEC-4184-8EEA-AE743BF09E6E}" type="datetimeFigureOut">
               <a:rPr lang="en-US" smtClean="0"/>
-              <a:t>9/28/2026</a:t>
+              <a:t>9/30/2026</a:t>
             </a:fld>
             <a:endParaRPr lang="en-US"/>
           </a:p>
@@ -3948,7 +3948,7 @@
           <a:p>
             <a:fld id="{778AC457-5DEC-4184-8EEA-AE743BF09E6E}" type="datetimeFigureOut">
               <a:rPr lang="en-US" smtClean="0"/>
-              <a:t>9/28/2026</a:t>
+              <a:t>9/30/2026</a:t>
             </a:fld>
             <a:endParaRPr lang="en-US"/>
           </a:p>
@@ -4261,7 +4261,7 @@
           <a:p>
             <a:fld id="{778AC457-5DEC-4184-8EEA-AE743BF09E6E}" type="datetimeFigureOut">
               <a:rPr lang="en-US" smtClean="0"/>
-              <a:t>9/28/2026</a:t>
+              <a:t>9/30/2026</a:t>
             </a:fld>
             <a:endParaRPr lang="en-US"/>
           </a:p>
@@ -4550,7 +4550,7 @@
           <a:p>
             <a:fld id="{778AC457-5DEC-4184-8EEA-AE743BF09E6E}" type="datetimeFigureOut">
               <a:rPr lang="en-US" smtClean="0"/>
-              <a:t>9/28/2026</a:t>
+              <a:t>9/30/2026</a:t>
             </a:fld>
             <a:endParaRPr lang="en-US"/>
           </a:p>
@@ -4793,7 +4793,7 @@
           <a:p>
             <a:fld id="{778AC457-5DEC-4184-8EEA-AE743BF09E6E}" type="datetimeFigureOut">
               <a:rPr lang="en-US" smtClean="0"/>
-              <a:t>9/28/2026</a:t>
+              <a:t>9/30/2026</a:t>
             </a:fld>
             <a:endParaRPr lang="en-US"/>
           </a:p>
@@ -9812,160 +9812,698 @@
           </a:p>
         </p:txBody>
       </p:sp>
-      <p:sp>
-        <p:nvSpPr>
-          <p:cNvPr id="4" name="Rectángulo: esquinas redondeadas 3">
-            <a:extLst>
-              <a:ext uri="{FF2B5EF4-FFF2-40B4-BE49-F238E27FC236}">
-                <a16:creationId xmlns:a16="http://schemas.microsoft.com/office/drawing/2014/main" id="{74A1F6F7-95CE-4962-B627-08020CD5BF81}"/>
-              </a:ext>
-            </a:extLst>
-          </p:cNvPr>
-          <p:cNvSpPr/>
-          <p:nvPr/>
-        </p:nvSpPr>
-        <p:spPr>
-          <a:xfrm>
-            <a:off x="609600" y="1498600"/>
-            <a:ext cx="3505200" cy="4267200"/>
-          </a:xfrm>
-          <a:prstGeom prst="roundRect">
-            <a:avLst>
-              <a:gd name="adj" fmla="val 5000"/>
-            </a:avLst>
-          </a:prstGeom>
-          <a:solidFill>
-            <a:srgbClr val="E4F3FA"/>
-          </a:solidFill>
-          <a:ln w="12700" cap="flat" cmpd="sng" algn="ctr">
+      <p:grpSp>
+        <p:nvGrpSpPr>
+          <p:cNvPr id="18" name="Grupo 17">
+            <a:extLst>
+              <a:ext uri="{FF2B5EF4-FFF2-40B4-BE49-F238E27FC236}">
+                <a16:creationId xmlns:a16="http://schemas.microsoft.com/office/drawing/2014/main" id="{3B6B77DB-16CF-4796-8CE0-FFD30BE37CCD}"/>
+              </a:ext>
+            </a:extLst>
+          </p:cNvPr>
+          <p:cNvGrpSpPr/>
+          <p:nvPr/>
+        </p:nvGrpSpPr>
+        <p:grpSpPr>
+          <a:xfrm>
+            <a:off x="609600" y="1523999"/>
+            <a:ext cx="10718800" cy="4343400"/>
+            <a:chOff x="1874520" y="1529080"/>
+            <a:chExt cx="7239000" cy="4343400"/>
+          </a:xfrm>
+        </p:grpSpPr>
+        <p:sp>
+          <p:nvSpPr>
+            <p:cNvPr id="8" name="Rectángulo: esquinas redondeadas 7">
+              <a:extLst>
+                <a:ext uri="{FF2B5EF4-FFF2-40B4-BE49-F238E27FC236}">
+                  <a16:creationId xmlns:a16="http://schemas.microsoft.com/office/drawing/2014/main" id="{40BF8AAC-464D-4DC1-B8AB-3C4D583BBFAF}"/>
+                </a:ext>
+              </a:extLst>
+            </p:cNvPr>
+            <p:cNvSpPr/>
+            <p:nvPr/>
+          </p:nvSpPr>
+          <p:spPr>
+            <a:xfrm>
+              <a:off x="1874520" y="1529080"/>
+              <a:ext cx="3505200" cy="4267200"/>
+            </a:xfrm>
+            <a:prstGeom prst="roundRect">
+              <a:avLst>
+                <a:gd name="adj" fmla="val 5000"/>
+              </a:avLst>
+            </a:prstGeom>
+            <a:solidFill>
+              <a:srgbClr val="EEF3F9"/>
+            </a:solidFill>
+            <a:ln w="12700" cap="flat" cmpd="sng" algn="ctr">
+              <a:noFill/>
+              <a:prstDash val="solid"/>
+              <a:miter lim="800000"/>
+            </a:ln>
+            <a:effectLst/>
+            <a:extLst>
+              <a:ext uri="{91240B29-F687-4F45-9708-019B960494DF}">
+                <a14:hiddenLine xmlns:a14="http://schemas.microsoft.com/office/drawing/2010/main" w="12700" cap="flat" cmpd="sng" algn="ctr">
+                  <a:solidFill>
+                    <a:schemeClr val="accent1">
+                      <a:shade val="50000"/>
+                    </a:schemeClr>
+                  </a:solidFill>
+                  <a:prstDash val="solid"/>
+                  <a:miter lim="800000"/>
+                </a14:hiddenLine>
+              </a:ext>
+            </a:extLst>
+          </p:spPr>
+          <p:style>
+            <a:lnRef idx="2">
+              <a:schemeClr val="accent1">
+                <a:shade val="50000"/>
+              </a:schemeClr>
+            </a:lnRef>
+            <a:fillRef idx="1">
+              <a:schemeClr val="accent1"/>
+            </a:fillRef>
+            <a:effectRef idx="0">
+              <a:schemeClr val="accent1"/>
+            </a:effectRef>
+            <a:fontRef idx="minor">
+              <a:schemeClr val="lt1"/>
+            </a:fontRef>
+          </p:style>
+          <p:txBody>
+            <a:bodyPr rtlCol="0" anchor="ctr"/>
+            <a:lstStyle/>
+            <a:p>
+              <a:pPr algn="ctr"/>
+              <a:endParaRPr lang="en-US"/>
+            </a:p>
+          </p:txBody>
+        </p:sp>
+        <p:sp>
+          <p:nvSpPr>
+            <p:cNvPr id="9" name="Rectángulo: esquinas redondeadas 8">
+              <a:extLst>
+                <a:ext uri="{FF2B5EF4-FFF2-40B4-BE49-F238E27FC236}">
+                  <a16:creationId xmlns:a16="http://schemas.microsoft.com/office/drawing/2014/main" id="{568E691E-3D52-4615-9886-F638A5FC03EE}"/>
+                </a:ext>
+              </a:extLst>
+            </p:cNvPr>
+            <p:cNvSpPr/>
+            <p:nvPr/>
+          </p:nvSpPr>
+          <p:spPr>
+            <a:xfrm>
+              <a:off x="2128520" y="1757680"/>
+              <a:ext cx="1143000" cy="279400"/>
+            </a:xfrm>
+            <a:prstGeom prst="roundRect">
+              <a:avLst>
+                <a:gd name="adj" fmla="val 50000"/>
+              </a:avLst>
+            </a:prstGeom>
+            <a:solidFill>
+              <a:srgbClr val="1F5FBF"/>
+            </a:solidFill>
+            <a:ln w="12700" cap="flat" cmpd="sng" algn="ctr">
+              <a:noFill/>
+              <a:prstDash val="solid"/>
+              <a:miter lim="800000"/>
+            </a:ln>
+            <a:effectLst/>
+            <a:extLst>
+              <a:ext uri="{91240B29-F687-4F45-9708-019B960494DF}">
+                <a14:hiddenLine xmlns:a14="http://schemas.microsoft.com/office/drawing/2010/main" w="12700" cap="flat" cmpd="sng" algn="ctr">
+                  <a:solidFill>
+                    <a:schemeClr val="accent1">
+                      <a:shade val="50000"/>
+                    </a:schemeClr>
+                  </a:solidFill>
+                  <a:prstDash val="solid"/>
+                  <a:miter lim="800000"/>
+                </a14:hiddenLine>
+              </a:ext>
+            </a:extLst>
+          </p:spPr>
+          <p:style>
+            <a:lnRef idx="2">
+              <a:schemeClr val="accent1">
+                <a:shade val="50000"/>
+              </a:schemeClr>
+            </a:lnRef>
+            <a:fillRef idx="1">
+              <a:schemeClr val="accent1"/>
+            </a:fillRef>
+            <a:effectRef idx="0">
+              <a:schemeClr val="accent1"/>
+            </a:effectRef>
+            <a:fontRef idx="minor">
+              <a:schemeClr val="lt1"/>
+            </a:fontRef>
+          </p:style>
+          <p:txBody>
+            <a:bodyPr lIns="50800" tIns="50800" rIns="50800" bIns="50800" rtlCol="0" anchor="ctr"/>
+            <a:lstStyle/>
+            <a:p>
+              <a:pPr algn="ctr"/>
+              <a:r>
+                <a:rPr lang="en-US" sz="1100" b="1">
+                  <a:solidFill>
+                    <a:srgbClr val="FFFFFF"/>
+                  </a:solidFill>
+                  <a:latin typeface="Arial" panose="020B0604020202020204" pitchFamily="34" charset="0"/>
+                </a:rPr>
+                <a:t>PRÓXIMO</a:t>
+              </a:r>
+            </a:p>
+          </p:txBody>
+        </p:sp>
+        <p:sp>
+          <p:nvSpPr>
+            <p:cNvPr id="10" name="CuadroTexto 9">
+              <a:extLst>
+                <a:ext uri="{FF2B5EF4-FFF2-40B4-BE49-F238E27FC236}">
+                  <a16:creationId xmlns:a16="http://schemas.microsoft.com/office/drawing/2014/main" id="{111A1899-A665-4C17-AB6C-9E1550E8E4A2}"/>
+                </a:ext>
+              </a:extLst>
+            </p:cNvPr>
+            <p:cNvSpPr txBox="1"/>
+            <p:nvPr/>
+          </p:nvSpPr>
+          <p:spPr>
+            <a:xfrm>
+              <a:off x="2128520" y="2189480"/>
+              <a:ext cx="2997200" cy="304800"/>
+            </a:xfrm>
+            <a:prstGeom prst="rect">
+              <a:avLst/>
+            </a:prstGeom>
             <a:noFill/>
-            <a:prstDash val="solid"/>
-            <a:miter lim="800000"/>
-          </a:ln>
-          <a:effectLst/>
-          <a:extLst>
-            <a:ext uri="{91240B29-F687-4F45-9708-019B960494DF}">
-              <a14:hiddenLine xmlns:a14="http://schemas.microsoft.com/office/drawing/2010/main" w="12700" cap="flat" cmpd="sng" algn="ctr">
-                <a:solidFill>
-                  <a:schemeClr val="accent1">
-                    <a:shade val="50000"/>
-                  </a:schemeClr>
-                </a:solidFill>
-                <a:prstDash val="solid"/>
-                <a:miter lim="800000"/>
-              </a14:hiddenLine>
-            </a:ext>
-          </a:extLst>
-        </p:spPr>
-        <p:style>
-          <a:lnRef idx="2">
-            <a:schemeClr val="accent1">
-              <a:shade val="50000"/>
-            </a:schemeClr>
-          </a:lnRef>
-          <a:fillRef idx="1">
-            <a:schemeClr val="accent1"/>
-          </a:fillRef>
-          <a:effectRef idx="0">
-            <a:schemeClr val="accent1"/>
-          </a:effectRef>
-          <a:fontRef idx="minor">
-            <a:schemeClr val="lt1"/>
-          </a:fontRef>
-        </p:style>
-        <p:txBody>
-          <a:bodyPr rtlCol="0" anchor="ctr"/>
-          <a:lstStyle/>
-          <a:p>
-            <a:pPr algn="ctr"/>
-            <a:endParaRPr lang="en-US"/>
-          </a:p>
-        </p:txBody>
-      </p:sp>
-      <p:sp>
-        <p:nvSpPr>
-          <p:cNvPr id="5" name="Rectángulo: esquinas redondeadas 4">
-            <a:extLst>
-              <a:ext uri="{FF2B5EF4-FFF2-40B4-BE49-F238E27FC236}">
-                <a16:creationId xmlns:a16="http://schemas.microsoft.com/office/drawing/2014/main" id="{26CEDDE6-E0F3-48F3-8D06-1C6DBC45BCAB}"/>
-              </a:ext>
-            </a:extLst>
-          </p:cNvPr>
-          <p:cNvSpPr/>
-          <p:nvPr/>
-        </p:nvSpPr>
-        <p:spPr>
-          <a:xfrm>
-            <a:off x="863600" y="1727200"/>
-            <a:ext cx="1143000" cy="279400"/>
-          </a:xfrm>
-          <a:prstGeom prst="roundRect">
-            <a:avLst>
-              <a:gd name="adj" fmla="val 50000"/>
-            </a:avLst>
-          </a:prstGeom>
-          <a:solidFill>
-            <a:srgbClr val="1BA9D1"/>
-          </a:solidFill>
-          <a:ln w="12700" cap="flat" cmpd="sng" algn="ctr">
+          </p:spPr>
+          <p:txBody>
+            <a:bodyPr vert="horz" wrap="square" lIns="0" tIns="0" rIns="0" bIns="0" rtlCol="0" anchor="t">
+              <a:noAutofit/>
+            </a:bodyPr>
+            <a:lstStyle/>
+            <a:p>
+              <a:r>
+                <a:rPr lang="en-US" sz="2400" b="1" dirty="0" err="1">
+                  <a:solidFill>
+                    <a:srgbClr val="17212F"/>
+                  </a:solidFill>
+                  <a:latin typeface="Arial" panose="020B0604020202020204" pitchFamily="34" charset="0"/>
+                </a:rPr>
+                <a:t>Testeo</a:t>
+              </a:r>
+              <a:r>
+                <a:rPr lang="en-US" sz="2400" b="1" dirty="0">
+                  <a:solidFill>
+                    <a:srgbClr val="17212F"/>
+                  </a:solidFill>
+                  <a:latin typeface="Arial" panose="020B0604020202020204" pitchFamily="34" charset="0"/>
+                </a:rPr>
+                <a:t> y </a:t>
+              </a:r>
+              <a:r>
+                <a:rPr lang="en-US" sz="2400" b="1" dirty="0" err="1">
+                  <a:solidFill>
+                    <a:srgbClr val="17212F"/>
+                  </a:solidFill>
+                  <a:latin typeface="Arial" panose="020B0604020202020204" pitchFamily="34" charset="0"/>
+                </a:rPr>
+                <a:t>ensayos</a:t>
+              </a:r>
+              <a:endParaRPr lang="en-US" sz="2000" b="1" dirty="0">
+                <a:solidFill>
+                  <a:srgbClr val="17212F"/>
+                </a:solidFill>
+                <a:latin typeface="Arial" panose="020B0604020202020204" pitchFamily="34" charset="0"/>
+              </a:endParaRPr>
+            </a:p>
+          </p:txBody>
+        </p:sp>
+        <p:sp>
+          <p:nvSpPr>
+            <p:cNvPr id="11" name="CuadroTexto 10">
+              <a:extLst>
+                <a:ext uri="{FF2B5EF4-FFF2-40B4-BE49-F238E27FC236}">
+                  <a16:creationId xmlns:a16="http://schemas.microsoft.com/office/drawing/2014/main" id="{FD268046-BE0B-4FD8-88F4-F44F006360BC}"/>
+                </a:ext>
+              </a:extLst>
+            </p:cNvPr>
+            <p:cNvSpPr txBox="1"/>
+            <p:nvPr/>
+          </p:nvSpPr>
+          <p:spPr>
+            <a:xfrm>
+              <a:off x="2128519" y="2824480"/>
+              <a:ext cx="2997200" cy="3048000"/>
+            </a:xfrm>
+            <a:prstGeom prst="rect">
+              <a:avLst/>
+            </a:prstGeom>
             <a:noFill/>
-            <a:prstDash val="solid"/>
-            <a:miter lim="800000"/>
-          </a:ln>
-          <a:effectLst/>
-          <a:extLst>
-            <a:ext uri="{91240B29-F687-4F45-9708-019B960494DF}">
-              <a14:hiddenLine xmlns:a14="http://schemas.microsoft.com/office/drawing/2010/main" w="12700" cap="flat" cmpd="sng" algn="ctr">
-                <a:solidFill>
-                  <a:schemeClr val="accent1">
-                    <a:shade val="50000"/>
-                  </a:schemeClr>
-                </a:solidFill>
-                <a:prstDash val="solid"/>
-                <a:miter lim="800000"/>
-              </a14:hiddenLine>
-            </a:ext>
-          </a:extLst>
-        </p:spPr>
-        <p:style>
-          <a:lnRef idx="2">
-            <a:schemeClr val="accent1">
-              <a:shade val="50000"/>
-            </a:schemeClr>
-          </a:lnRef>
-          <a:fillRef idx="1">
-            <a:schemeClr val="accent1"/>
-          </a:fillRef>
-          <a:effectRef idx="0">
-            <a:schemeClr val="accent1"/>
-          </a:effectRef>
-          <a:fontRef idx="minor">
-            <a:schemeClr val="lt1"/>
-          </a:fontRef>
-        </p:style>
-        <p:txBody>
-          <a:bodyPr lIns="50800" tIns="50800" rIns="50800" bIns="50800" rtlCol="0" anchor="ctr"/>
-          <a:lstStyle/>
-          <a:p>
-            <a:pPr algn="ctr"/>
-            <a:r>
-              <a:rPr lang="en-US" sz="1100" b="1">
-                <a:solidFill>
-                  <a:srgbClr val="FFFFFF"/>
-                </a:solidFill>
-                <a:latin typeface="Arial" panose="020B0604020202020204" pitchFamily="34" charset="0"/>
-              </a:rPr>
-              <a:t>YA</a:t>
-            </a:r>
-          </a:p>
-        </p:txBody>
-      </p:sp>
-      <p:sp>
-        <p:nvSpPr>
-          <p:cNvPr id="6" name="CuadroTexto 5">
-            <a:extLst>
-              <a:ext uri="{FF2B5EF4-FFF2-40B4-BE49-F238E27FC236}">
-                <a16:creationId xmlns:a16="http://schemas.microsoft.com/office/drawing/2014/main" id="{BB7A162B-6D65-4363-A6CA-2CFD5E8B76A4}"/>
+          </p:spPr>
+          <p:txBody>
+            <a:bodyPr vert="horz" wrap="square" lIns="0" tIns="0" rIns="0" bIns="0" rtlCol="0" anchor="t">
+              <a:noAutofit/>
+            </a:bodyPr>
+            <a:lstStyle/>
+            <a:p>
+              <a:pPr marL="177800" indent="-177800">
+                <a:spcAft>
+                  <a:spcPts val="800"/>
+                </a:spcAft>
+                <a:buClr>
+                  <a:srgbClr val="1F5FBF"/>
+                </a:buClr>
+                <a:buFont typeface="+mj-lt"/>
+                <a:buChar char="•"/>
+              </a:pPr>
+              <a:r>
+                <a:rPr lang="es-ES" dirty="0">
+                  <a:solidFill>
+                    <a:srgbClr val="17212F"/>
+                  </a:solidFill>
+                  <a:latin typeface="Calibri" panose="020F0502020204030204" pitchFamily="34" charset="0"/>
+                </a:rPr>
+                <a:t>Terminar de testear PCB.</a:t>
+              </a:r>
+            </a:p>
+            <a:p>
+              <a:pPr marL="177800" indent="-177800">
+                <a:spcAft>
+                  <a:spcPts val="800"/>
+                </a:spcAft>
+                <a:buClr>
+                  <a:srgbClr val="1F5FBF"/>
+                </a:buClr>
+                <a:buFont typeface="+mj-lt"/>
+                <a:buChar char="•"/>
+              </a:pPr>
+              <a:r>
+                <a:rPr lang="es-ES" dirty="0">
+                  <a:solidFill>
+                    <a:srgbClr val="17212F"/>
+                  </a:solidFill>
+                  <a:latin typeface="Calibri" panose="020F0502020204030204" pitchFamily="34" charset="0"/>
+                </a:rPr>
+                <a:t>Preparar cables y conectores.</a:t>
+              </a:r>
+            </a:p>
+            <a:p>
+              <a:pPr marL="177800" indent="-177800">
+                <a:spcAft>
+                  <a:spcPts val="800"/>
+                </a:spcAft>
+                <a:buClr>
+                  <a:srgbClr val="1F5FBF"/>
+                </a:buClr>
+                <a:buFont typeface="+mj-lt"/>
+                <a:buChar char="•"/>
+              </a:pPr>
+              <a:r>
+                <a:rPr lang="es-ES" dirty="0">
+                  <a:solidFill>
+                    <a:srgbClr val="17212F"/>
+                  </a:solidFill>
+                  <a:latin typeface="Calibri" panose="020F0502020204030204" pitchFamily="34" charset="0"/>
+                </a:rPr>
+                <a:t>Montar electrónica.</a:t>
+              </a:r>
+            </a:p>
+            <a:p>
+              <a:pPr marL="177800" indent="-177800">
+                <a:spcAft>
+                  <a:spcPts val="800"/>
+                </a:spcAft>
+                <a:buClr>
+                  <a:srgbClr val="1F5FBF"/>
+                </a:buClr>
+                <a:buFont typeface="+mj-lt"/>
+                <a:buChar char="•"/>
+              </a:pPr>
+              <a:r>
+                <a:rPr lang="es-ES" dirty="0">
+                  <a:solidFill>
+                    <a:srgbClr val="17212F"/>
+                  </a:solidFill>
+                  <a:latin typeface="Calibri" panose="020F0502020204030204" pitchFamily="34" charset="0"/>
+                </a:rPr>
+                <a:t>Ensayos de tracción A,B,C,D.</a:t>
+              </a:r>
+            </a:p>
+          </p:txBody>
+        </p:sp>
+        <p:sp>
+          <p:nvSpPr>
+            <p:cNvPr id="12" name="Rectángulo: esquinas redondeadas 11">
+              <a:extLst>
+                <a:ext uri="{FF2B5EF4-FFF2-40B4-BE49-F238E27FC236}">
+                  <a16:creationId xmlns:a16="http://schemas.microsoft.com/office/drawing/2014/main" id="{422874BC-52D5-4023-8479-587F5086EE7F}"/>
+                </a:ext>
+              </a:extLst>
+            </p:cNvPr>
+            <p:cNvSpPr/>
+            <p:nvPr/>
+          </p:nvSpPr>
+          <p:spPr>
+            <a:xfrm>
+              <a:off x="5608320" y="1529080"/>
+              <a:ext cx="3505200" cy="4267200"/>
+            </a:xfrm>
+            <a:prstGeom prst="roundRect">
+              <a:avLst>
+                <a:gd name="adj" fmla="val 5000"/>
+              </a:avLst>
+            </a:prstGeom>
+            <a:solidFill>
+              <a:srgbClr val="F1F3F7"/>
+            </a:solidFill>
+            <a:ln w="12700" cap="flat" cmpd="sng" algn="ctr">
+              <a:noFill/>
+              <a:prstDash val="solid"/>
+              <a:miter lim="800000"/>
+            </a:ln>
+            <a:effectLst/>
+            <a:extLst>
+              <a:ext uri="{91240B29-F687-4F45-9708-019B960494DF}">
+                <a14:hiddenLine xmlns:a14="http://schemas.microsoft.com/office/drawing/2010/main" w="12700" cap="flat" cmpd="sng" algn="ctr">
+                  <a:solidFill>
+                    <a:schemeClr val="accent1">
+                      <a:shade val="50000"/>
+                    </a:schemeClr>
+                  </a:solidFill>
+                  <a:prstDash val="solid"/>
+                  <a:miter lim="800000"/>
+                </a14:hiddenLine>
+              </a:ext>
+            </a:extLst>
+          </p:spPr>
+          <p:style>
+            <a:lnRef idx="2">
+              <a:schemeClr val="accent1">
+                <a:shade val="50000"/>
+              </a:schemeClr>
+            </a:lnRef>
+            <a:fillRef idx="1">
+              <a:schemeClr val="accent1"/>
+            </a:fillRef>
+            <a:effectRef idx="0">
+              <a:schemeClr val="accent1"/>
+            </a:effectRef>
+            <a:fontRef idx="minor">
+              <a:schemeClr val="lt1"/>
+            </a:fontRef>
+          </p:style>
+          <p:txBody>
+            <a:bodyPr rtlCol="0" anchor="ctr"/>
+            <a:lstStyle/>
+            <a:p>
+              <a:pPr algn="ctr"/>
+              <a:endParaRPr lang="en-US"/>
+            </a:p>
+          </p:txBody>
+        </p:sp>
+        <p:sp>
+          <p:nvSpPr>
+            <p:cNvPr id="13" name="Rectángulo: esquinas redondeadas 12">
+              <a:extLst>
+                <a:ext uri="{FF2B5EF4-FFF2-40B4-BE49-F238E27FC236}">
+                  <a16:creationId xmlns:a16="http://schemas.microsoft.com/office/drawing/2014/main" id="{6FDEB2C1-5C27-4F88-878C-EDCA3661FB25}"/>
+                </a:ext>
+              </a:extLst>
+            </p:cNvPr>
+            <p:cNvSpPr/>
+            <p:nvPr/>
+          </p:nvSpPr>
+          <p:spPr>
+            <a:xfrm>
+              <a:off x="5862320" y="1757680"/>
+              <a:ext cx="1143000" cy="279400"/>
+            </a:xfrm>
+            <a:prstGeom prst="roundRect">
+              <a:avLst>
+                <a:gd name="adj" fmla="val 50000"/>
+              </a:avLst>
+            </a:prstGeom>
+            <a:solidFill>
+              <a:srgbClr val="0B1F3A"/>
+            </a:solidFill>
+            <a:ln w="12700" cap="flat" cmpd="sng" algn="ctr">
+              <a:noFill/>
+              <a:prstDash val="solid"/>
+              <a:miter lim="800000"/>
+            </a:ln>
+            <a:effectLst/>
+            <a:extLst>
+              <a:ext uri="{91240B29-F687-4F45-9708-019B960494DF}">
+                <a14:hiddenLine xmlns:a14="http://schemas.microsoft.com/office/drawing/2010/main" w="12700" cap="flat" cmpd="sng" algn="ctr">
+                  <a:solidFill>
+                    <a:schemeClr val="accent1">
+                      <a:shade val="50000"/>
+                    </a:schemeClr>
+                  </a:solidFill>
+                  <a:prstDash val="solid"/>
+                  <a:miter lim="800000"/>
+                </a14:hiddenLine>
+              </a:ext>
+            </a:extLst>
+          </p:spPr>
+          <p:style>
+            <a:lnRef idx="2">
+              <a:schemeClr val="accent1">
+                <a:shade val="50000"/>
+              </a:schemeClr>
+            </a:lnRef>
+            <a:fillRef idx="1">
+              <a:schemeClr val="accent1"/>
+            </a:fillRef>
+            <a:effectRef idx="0">
+              <a:schemeClr val="accent1"/>
+            </a:effectRef>
+            <a:fontRef idx="minor">
+              <a:schemeClr val="lt1"/>
+            </a:fontRef>
+          </p:style>
+          <p:txBody>
+            <a:bodyPr lIns="50800" tIns="50800" rIns="50800" bIns="50800" rtlCol="0" anchor="ctr"/>
+            <a:lstStyle/>
+            <a:p>
+              <a:pPr algn="ctr"/>
+              <a:r>
+                <a:rPr lang="en-US" sz="1100" b="1">
+                  <a:solidFill>
+                    <a:srgbClr val="FFFFFF"/>
+                  </a:solidFill>
+                  <a:latin typeface="Arial" panose="020B0604020202020204" pitchFamily="34" charset="0"/>
+                </a:rPr>
+                <a:t>DESPUÉS</a:t>
+              </a:r>
+            </a:p>
+          </p:txBody>
+        </p:sp>
+        <p:sp>
+          <p:nvSpPr>
+            <p:cNvPr id="14" name="CuadroTexto 13">
+              <a:extLst>
+                <a:ext uri="{FF2B5EF4-FFF2-40B4-BE49-F238E27FC236}">
+                  <a16:creationId xmlns:a16="http://schemas.microsoft.com/office/drawing/2014/main" id="{6339E157-A485-47FD-A315-35B468B15615}"/>
+                </a:ext>
+              </a:extLst>
+            </p:cNvPr>
+            <p:cNvSpPr txBox="1"/>
+            <p:nvPr/>
+          </p:nvSpPr>
+          <p:spPr>
+            <a:xfrm>
+              <a:off x="5862320" y="2189480"/>
+              <a:ext cx="2997200" cy="304800"/>
+            </a:xfrm>
+            <a:prstGeom prst="rect">
+              <a:avLst/>
+            </a:prstGeom>
+            <a:noFill/>
+          </p:spPr>
+          <p:txBody>
+            <a:bodyPr vert="horz" wrap="square" lIns="0" tIns="0" rIns="0" bIns="0" rtlCol="0" anchor="t">
+              <a:noAutofit/>
+            </a:bodyPr>
+            <a:lstStyle/>
+            <a:p>
+              <a:r>
+                <a:rPr lang="en-US" sz="2400" b="1" dirty="0">
+                  <a:solidFill>
+                    <a:srgbClr val="17212F"/>
+                  </a:solidFill>
+                  <a:latin typeface="Arial" panose="020B0604020202020204" pitchFamily="34" charset="0"/>
+                </a:rPr>
+                <a:t>Rover final</a:t>
+              </a:r>
+            </a:p>
+          </p:txBody>
+        </p:sp>
+        <p:sp>
+          <p:nvSpPr>
+            <p:cNvPr id="15" name="CuadroTexto 14">
+              <a:extLst>
+                <a:ext uri="{FF2B5EF4-FFF2-40B4-BE49-F238E27FC236}">
+                  <a16:creationId xmlns:a16="http://schemas.microsoft.com/office/drawing/2014/main" id="{F7EA31D5-E3D4-4055-A51C-7308BD03E059}"/>
+                </a:ext>
+              </a:extLst>
+            </p:cNvPr>
+            <p:cNvSpPr txBox="1"/>
+            <p:nvPr/>
+          </p:nvSpPr>
+          <p:spPr>
+            <a:xfrm>
+              <a:off x="5862320" y="2824480"/>
+              <a:ext cx="2997200" cy="3048000"/>
+            </a:xfrm>
+            <a:prstGeom prst="rect">
+              <a:avLst/>
+            </a:prstGeom>
+            <a:noFill/>
+          </p:spPr>
+          <p:txBody>
+            <a:bodyPr vert="horz" wrap="square" lIns="0" tIns="0" rIns="0" bIns="0" rtlCol="0" anchor="t">
+              <a:noAutofit/>
+            </a:bodyPr>
+            <a:lstStyle/>
+            <a:p>
+              <a:pPr marL="177800" indent="-177800">
+                <a:spcAft>
+                  <a:spcPts val="800"/>
+                </a:spcAft>
+                <a:buClr>
+                  <a:srgbClr val="0B1F3A"/>
+                </a:buClr>
+                <a:buFont typeface="+mj-lt"/>
+                <a:buChar char="•"/>
+              </a:pPr>
+              <a:r>
+                <a:rPr lang="es-ES" dirty="0">
+                  <a:solidFill>
+                    <a:srgbClr val="17212F"/>
+                  </a:solidFill>
+                  <a:latin typeface="Calibri" panose="020F0502020204030204" pitchFamily="34" charset="0"/>
+                </a:rPr>
+                <a:t>Elegir el motor de tracción.</a:t>
+              </a:r>
+            </a:p>
+            <a:p>
+              <a:pPr marL="177800" indent="-177800">
+                <a:spcAft>
+                  <a:spcPts val="800"/>
+                </a:spcAft>
+                <a:buClr>
+                  <a:srgbClr val="0B1F3A"/>
+                </a:buClr>
+                <a:buFont typeface="+mj-lt"/>
+                <a:buChar char="•"/>
+              </a:pPr>
+              <a:r>
+                <a:rPr lang="es-ES" dirty="0">
+                  <a:solidFill>
+                    <a:srgbClr val="17212F"/>
+                  </a:solidFill>
+                  <a:latin typeface="Calibri" panose="020F0502020204030204" pitchFamily="34" charset="0"/>
+                </a:rPr>
+                <a:t>Investigar tratamiento del ruido.</a:t>
+              </a:r>
+            </a:p>
+            <a:p>
+              <a:pPr marL="177800" indent="-177800">
+                <a:spcAft>
+                  <a:spcPts val="800"/>
+                </a:spcAft>
+                <a:buClr>
+                  <a:srgbClr val="0B1F3A"/>
+                </a:buClr>
+                <a:buFont typeface="+mj-lt"/>
+                <a:buChar char="•"/>
+              </a:pPr>
+              <a:r>
+                <a:rPr lang="es-ES" dirty="0">
+                  <a:solidFill>
+                    <a:srgbClr val="17212F"/>
+                  </a:solidFill>
+                  <a:latin typeface="Calibri" panose="020F0502020204030204" pitchFamily="34" charset="0"/>
+                </a:rPr>
+                <a:t>Presupuesto de corriente de todo el </a:t>
+              </a:r>
+              <a:r>
+                <a:rPr lang="es-ES" dirty="0" err="1">
+                  <a:solidFill>
+                    <a:srgbClr val="17212F"/>
+                  </a:solidFill>
+                  <a:latin typeface="Calibri" panose="020F0502020204030204" pitchFamily="34" charset="0"/>
+                </a:rPr>
+                <a:t>rover</a:t>
+              </a:r>
+              <a:endParaRPr lang="es-ES" dirty="0">
+                <a:solidFill>
+                  <a:srgbClr val="17212F"/>
+                </a:solidFill>
+                <a:latin typeface="Calibri" panose="020F0502020204030204" pitchFamily="34" charset="0"/>
+              </a:endParaRPr>
+            </a:p>
+            <a:p>
+              <a:pPr marL="177800" indent="-177800">
+                <a:spcAft>
+                  <a:spcPts val="800"/>
+                </a:spcAft>
+                <a:buClr>
+                  <a:srgbClr val="0B1F3A"/>
+                </a:buClr>
+                <a:buFont typeface="+mj-lt"/>
+                <a:buChar char="•"/>
+              </a:pPr>
+              <a:r>
+                <a:rPr lang="es-ES" dirty="0">
+                  <a:solidFill>
+                    <a:srgbClr val="17212F"/>
+                  </a:solidFill>
+                  <a:latin typeface="Calibri" panose="020F0502020204030204" pitchFamily="34" charset="0"/>
+                </a:rPr>
+                <a:t>Batería, PDB y cableado del </a:t>
+              </a:r>
+              <a:r>
+                <a:rPr lang="es-ES" dirty="0" err="1">
+                  <a:solidFill>
+                    <a:srgbClr val="17212F"/>
+                  </a:solidFill>
+                  <a:latin typeface="Calibri" panose="020F0502020204030204" pitchFamily="34" charset="0"/>
+                </a:rPr>
+                <a:t>rover</a:t>
+              </a:r>
+              <a:r>
+                <a:rPr lang="es-ES" dirty="0">
+                  <a:solidFill>
+                    <a:srgbClr val="17212F"/>
+                  </a:solidFill>
+                  <a:latin typeface="Calibri" panose="020F0502020204030204" pitchFamily="34" charset="0"/>
+                </a:rPr>
+                <a:t> final</a:t>
+              </a:r>
+              <a:endParaRPr lang="en-US" dirty="0">
+                <a:solidFill>
+                  <a:srgbClr val="17212F"/>
+                </a:solidFill>
+                <a:latin typeface="Calibri" panose="020F0502020204030204" pitchFamily="34" charset="0"/>
+              </a:endParaRPr>
+            </a:p>
+          </p:txBody>
+        </p:sp>
+      </p:grpSp>
+      <p:sp>
+        <p:nvSpPr>
+          <p:cNvPr id="16" name="CuadroTexto 15">
+            <a:extLst>
+              <a:ext uri="{FF2B5EF4-FFF2-40B4-BE49-F238E27FC236}">
+                <a16:creationId xmlns:a16="http://schemas.microsoft.com/office/drawing/2014/main" id="{1365CB8F-2733-4009-872A-3B533D91077E}"/>
               </a:ext>
             </a:extLst>
           </p:cNvPr>
@@ -9974,8 +10512,8 @@
         </p:nvSpPr>
         <p:spPr>
           <a:xfrm>
-            <a:off x="863600" y="2159000"/>
-            <a:ext cx="2997200" cy="304800"/>
+            <a:off x="609600" y="5943599"/>
+            <a:ext cx="9906000" cy="457200"/>
           </a:xfrm>
           <a:prstGeom prst="rect">
             <a:avLst/>
@@ -9989,767 +10527,15 @@
           <a:lstStyle/>
           <a:p>
             <a:r>
-              <a:rPr lang="en-US" sz="1700" b="1">
-                <a:solidFill>
-                  <a:srgbClr val="17212F"/>
-                </a:solidFill>
-                <a:latin typeface="Arial" panose="020B0604020202020204" pitchFamily="34" charset="0"/>
-              </a:rPr>
-              <a:t>Sin depender de nadie</a:t>
-            </a:r>
-          </a:p>
-        </p:txBody>
-      </p:sp>
-      <p:sp>
-        <p:nvSpPr>
-          <p:cNvPr id="7" name="CuadroTexto 6">
-            <a:extLst>
-              <a:ext uri="{FF2B5EF4-FFF2-40B4-BE49-F238E27FC236}">
-                <a16:creationId xmlns:a16="http://schemas.microsoft.com/office/drawing/2014/main" id="{9CFD9DDF-E522-4B22-89F7-0AFE9DBBA963}"/>
-              </a:ext>
-            </a:extLst>
-          </p:cNvPr>
-          <p:cNvSpPr txBox="1"/>
-          <p:nvPr/>
-        </p:nvSpPr>
-        <p:spPr>
-          <a:xfrm>
-            <a:off x="863600" y="2616200"/>
-            <a:ext cx="2997200" cy="3048000"/>
-          </a:xfrm>
-          <a:prstGeom prst="rect">
-            <a:avLst/>
-          </a:prstGeom>
-          <a:noFill/>
-        </p:spPr>
-        <p:txBody>
-          <a:bodyPr vert="horz" wrap="square" lIns="0" tIns="0" rIns="0" bIns="0" rtlCol="0" anchor="t">
-            <a:noAutofit/>
-          </a:bodyPr>
-          <a:lstStyle/>
-          <a:p>
-            <a:pPr marL="177800" indent="-177800">
-              <a:spcAft>
-                <a:spcPts val="800"/>
-              </a:spcAft>
-              <a:buClr>
-                <a:srgbClr val="1BA9D1"/>
-              </a:buClr>
-              <a:buFont typeface="+mj-lt"/>
-              <a:buChar char="•"/>
-            </a:pPr>
-            <a:r>
-              <a:rPr lang="es-ES" sz="1350" dirty="0">
-                <a:solidFill>
-                  <a:srgbClr val="17212F"/>
+              <a:rPr lang="es-ES" sz="1400" i="1" dirty="0">
+                <a:solidFill>
+                  <a:srgbClr val="5A6B80"/>
                 </a:solidFill>
                 <a:latin typeface="Calibri" panose="020F0502020204030204" pitchFamily="34" charset="0"/>
               </a:rPr>
-              <a:t>Ensayo de ángulo de deslizamiento: da el μ real</a:t>
-            </a:r>
-          </a:p>
-          <a:p>
-            <a:pPr marL="177800" indent="-177800">
-              <a:spcAft>
-                <a:spcPts val="800"/>
-              </a:spcAft>
-              <a:buClr>
-                <a:srgbClr val="1BA9D1"/>
-              </a:buClr>
-              <a:buFont typeface="+mj-lt"/>
-              <a:buChar char="•"/>
-            </a:pPr>
-            <a:r>
-              <a:rPr lang="es-ES" sz="1350" dirty="0">
-                <a:solidFill>
-                  <a:srgbClr val="17212F"/>
-                </a:solidFill>
-                <a:latin typeface="Calibri" panose="020F0502020204030204" pitchFamily="34" charset="0"/>
-              </a:rPr>
-              <a:t>Pesar el modelo con todo montado</a:t>
-            </a:r>
-          </a:p>
-          <a:p>
-            <a:pPr marL="177800" indent="-177800">
-              <a:spcAft>
-                <a:spcPts val="800"/>
-              </a:spcAft>
-              <a:buClr>
-                <a:srgbClr val="1BA9D1"/>
-              </a:buClr>
-              <a:buFont typeface="+mj-lt"/>
-              <a:buChar char="•"/>
-            </a:pPr>
-            <a:r>
-              <a:rPr lang="es-ES" sz="1350" dirty="0">
-                <a:solidFill>
-                  <a:srgbClr val="17212F"/>
-                </a:solidFill>
-                <a:latin typeface="Calibri" panose="020F0502020204030204" pitchFamily="34" charset="0"/>
-              </a:rPr>
-              <a:t>Cerrar V1, V2 y V3 con osciloscopio</a:t>
-            </a:r>
-          </a:p>
-          <a:p>
-            <a:pPr marL="177800" indent="-177800">
-              <a:spcAft>
-                <a:spcPts val="800"/>
-              </a:spcAft>
-              <a:buClr>
-                <a:srgbClr val="1BA9D1"/>
-              </a:buClr>
-              <a:buFont typeface="+mj-lt"/>
-              <a:buChar char="•"/>
-            </a:pPr>
-            <a:r>
-              <a:rPr lang="es-ES" sz="1350" dirty="0">
-                <a:solidFill>
-                  <a:srgbClr val="17212F"/>
-                </a:solidFill>
-                <a:latin typeface="Calibri" panose="020F0502020204030204" pitchFamily="34" charset="0"/>
-              </a:rPr>
-              <a:t>Ensayo A en banco: constante K del motor y calibración del sensor</a:t>
-            </a:r>
-          </a:p>
-          <a:p>
-            <a:pPr marL="177800" indent="-177800">
-              <a:spcAft>
-                <a:spcPts val="800"/>
-              </a:spcAft>
-              <a:buClr>
-                <a:srgbClr val="1BA9D1"/>
-              </a:buClr>
-              <a:buFont typeface="+mj-lt"/>
-              <a:buChar char="•"/>
-            </a:pPr>
-            <a:r>
-              <a:rPr lang="es-ES" sz="1350" dirty="0">
-                <a:solidFill>
-                  <a:srgbClr val="17212F"/>
-                </a:solidFill>
-                <a:latin typeface="Calibri" panose="020F0502020204030204" pitchFamily="34" charset="0"/>
-              </a:rPr>
-              <a:t>Comprar ADS1115 (3 USD) y balanza de gancho (12 USD)</a:t>
-            </a:r>
-            <a:endParaRPr lang="en-US" sz="1350" dirty="0">
-              <a:solidFill>
-                <a:srgbClr val="17212F"/>
-              </a:solidFill>
-              <a:latin typeface="Calibri" panose="020F0502020204030204" pitchFamily="34" charset="0"/>
-            </a:endParaRPr>
-          </a:p>
-        </p:txBody>
-      </p:sp>
-      <p:sp>
-        <p:nvSpPr>
-          <p:cNvPr id="8" name="Rectángulo: esquinas redondeadas 7">
-            <a:extLst>
-              <a:ext uri="{FF2B5EF4-FFF2-40B4-BE49-F238E27FC236}">
-                <a16:creationId xmlns:a16="http://schemas.microsoft.com/office/drawing/2014/main" id="{40BF8AAC-464D-4DC1-B8AB-3C4D583BBFAF}"/>
-              </a:ext>
-            </a:extLst>
-          </p:cNvPr>
-          <p:cNvSpPr/>
-          <p:nvPr/>
-        </p:nvSpPr>
-        <p:spPr>
-          <a:xfrm>
-            <a:off x="4343400" y="1498600"/>
-            <a:ext cx="3505200" cy="4267200"/>
-          </a:xfrm>
-          <a:prstGeom prst="roundRect">
-            <a:avLst>
-              <a:gd name="adj" fmla="val 5000"/>
-            </a:avLst>
-          </a:prstGeom>
-          <a:solidFill>
-            <a:srgbClr val="EEF3F9"/>
-          </a:solidFill>
-          <a:ln w="12700" cap="flat" cmpd="sng" algn="ctr">
-            <a:noFill/>
-            <a:prstDash val="solid"/>
-            <a:miter lim="800000"/>
-          </a:ln>
-          <a:effectLst/>
-          <a:extLst>
-            <a:ext uri="{91240B29-F687-4F45-9708-019B960494DF}">
-              <a14:hiddenLine xmlns:a14="http://schemas.microsoft.com/office/drawing/2010/main" w="12700" cap="flat" cmpd="sng" algn="ctr">
-                <a:solidFill>
-                  <a:schemeClr val="accent1">
-                    <a:shade val="50000"/>
-                  </a:schemeClr>
-                </a:solidFill>
-                <a:prstDash val="solid"/>
-                <a:miter lim="800000"/>
-              </a14:hiddenLine>
-            </a:ext>
-          </a:extLst>
-        </p:spPr>
-        <p:style>
-          <a:lnRef idx="2">
-            <a:schemeClr val="accent1">
-              <a:shade val="50000"/>
-            </a:schemeClr>
-          </a:lnRef>
-          <a:fillRef idx="1">
-            <a:schemeClr val="accent1"/>
-          </a:fillRef>
-          <a:effectRef idx="0">
-            <a:schemeClr val="accent1"/>
-          </a:effectRef>
-          <a:fontRef idx="minor">
-            <a:schemeClr val="lt1"/>
-          </a:fontRef>
-        </p:style>
-        <p:txBody>
-          <a:bodyPr rtlCol="0" anchor="ctr"/>
-          <a:lstStyle/>
-          <a:p>
-            <a:pPr algn="ctr"/>
-            <a:endParaRPr lang="en-US"/>
-          </a:p>
-        </p:txBody>
-      </p:sp>
-      <p:sp>
-        <p:nvSpPr>
-          <p:cNvPr id="9" name="Rectángulo: esquinas redondeadas 8">
-            <a:extLst>
-              <a:ext uri="{FF2B5EF4-FFF2-40B4-BE49-F238E27FC236}">
-                <a16:creationId xmlns:a16="http://schemas.microsoft.com/office/drawing/2014/main" id="{568E691E-3D52-4615-9886-F638A5FC03EE}"/>
-              </a:ext>
-            </a:extLst>
-          </p:cNvPr>
-          <p:cNvSpPr/>
-          <p:nvPr/>
-        </p:nvSpPr>
-        <p:spPr>
-          <a:xfrm>
-            <a:off x="4597400" y="1727200"/>
-            <a:ext cx="1143000" cy="279400"/>
-          </a:xfrm>
-          <a:prstGeom prst="roundRect">
-            <a:avLst>
-              <a:gd name="adj" fmla="val 50000"/>
-            </a:avLst>
-          </a:prstGeom>
-          <a:solidFill>
-            <a:srgbClr val="1F5FBF"/>
-          </a:solidFill>
-          <a:ln w="12700" cap="flat" cmpd="sng" algn="ctr">
-            <a:noFill/>
-            <a:prstDash val="solid"/>
-            <a:miter lim="800000"/>
-          </a:ln>
-          <a:effectLst/>
-          <a:extLst>
-            <a:ext uri="{91240B29-F687-4F45-9708-019B960494DF}">
-              <a14:hiddenLine xmlns:a14="http://schemas.microsoft.com/office/drawing/2010/main" w="12700" cap="flat" cmpd="sng" algn="ctr">
-                <a:solidFill>
-                  <a:schemeClr val="accent1">
-                    <a:shade val="50000"/>
-                  </a:schemeClr>
-                </a:solidFill>
-                <a:prstDash val="solid"/>
-                <a:miter lim="800000"/>
-              </a14:hiddenLine>
-            </a:ext>
-          </a:extLst>
-        </p:spPr>
-        <p:style>
-          <a:lnRef idx="2">
-            <a:schemeClr val="accent1">
-              <a:shade val="50000"/>
-            </a:schemeClr>
-          </a:lnRef>
-          <a:fillRef idx="1">
-            <a:schemeClr val="accent1"/>
-          </a:fillRef>
-          <a:effectRef idx="0">
-            <a:schemeClr val="accent1"/>
-          </a:effectRef>
-          <a:fontRef idx="minor">
-            <a:schemeClr val="lt1"/>
-          </a:fontRef>
-        </p:style>
-        <p:txBody>
-          <a:bodyPr lIns="50800" tIns="50800" rIns="50800" bIns="50800" rtlCol="0" anchor="ctr"/>
-          <a:lstStyle/>
-          <a:p>
-            <a:pPr algn="ctr"/>
-            <a:r>
-              <a:rPr lang="en-US" sz="1100" b="1">
-                <a:solidFill>
-                  <a:srgbClr val="FFFFFF"/>
-                </a:solidFill>
-                <a:latin typeface="Arial" panose="020B0604020202020204" pitchFamily="34" charset="0"/>
-              </a:rPr>
-              <a:t>PRÓXIMO</a:t>
-            </a:r>
-          </a:p>
-        </p:txBody>
-      </p:sp>
-      <p:sp>
-        <p:nvSpPr>
-          <p:cNvPr id="10" name="CuadroTexto 9">
-            <a:extLst>
-              <a:ext uri="{FF2B5EF4-FFF2-40B4-BE49-F238E27FC236}">
-                <a16:creationId xmlns:a16="http://schemas.microsoft.com/office/drawing/2014/main" id="{111A1899-A665-4C17-AB6C-9E1550E8E4A2}"/>
-              </a:ext>
-            </a:extLst>
-          </p:cNvPr>
-          <p:cNvSpPr txBox="1"/>
-          <p:nvPr/>
-        </p:nvSpPr>
-        <p:spPr>
-          <a:xfrm>
-            <a:off x="4597400" y="2159000"/>
-            <a:ext cx="2997200" cy="304800"/>
-          </a:xfrm>
-          <a:prstGeom prst="rect">
-            <a:avLst/>
-          </a:prstGeom>
-          <a:noFill/>
-        </p:spPr>
-        <p:txBody>
-          <a:bodyPr vert="horz" wrap="square" lIns="0" tIns="0" rIns="0" bIns="0" rtlCol="0" anchor="t">
-            <a:noAutofit/>
-          </a:bodyPr>
-          <a:lstStyle/>
-          <a:p>
-            <a:r>
-              <a:rPr lang="en-US" sz="1700" b="1">
-                <a:solidFill>
-                  <a:srgbClr val="17212F"/>
-                </a:solidFill>
-                <a:latin typeface="Arial" panose="020B0604020202020204" pitchFamily="34" charset="0"/>
-              </a:rPr>
-              <a:t>Ensayos del modelo</a:t>
-            </a:r>
-          </a:p>
-        </p:txBody>
-      </p:sp>
-      <p:sp>
-        <p:nvSpPr>
-          <p:cNvPr id="11" name="CuadroTexto 10">
-            <a:extLst>
-              <a:ext uri="{FF2B5EF4-FFF2-40B4-BE49-F238E27FC236}">
-                <a16:creationId xmlns:a16="http://schemas.microsoft.com/office/drawing/2014/main" id="{FD268046-BE0B-4FD8-88F4-F44F006360BC}"/>
-              </a:ext>
-            </a:extLst>
-          </p:cNvPr>
-          <p:cNvSpPr txBox="1"/>
-          <p:nvPr/>
-        </p:nvSpPr>
-        <p:spPr>
-          <a:xfrm>
-            <a:off x="4597400" y="2616200"/>
-            <a:ext cx="2997200" cy="3048000"/>
-          </a:xfrm>
-          <a:prstGeom prst="rect">
-            <a:avLst/>
-          </a:prstGeom>
-          <a:noFill/>
-        </p:spPr>
-        <p:txBody>
-          <a:bodyPr vert="horz" wrap="square" lIns="0" tIns="0" rIns="0" bIns="0" rtlCol="0" anchor="t">
-            <a:noAutofit/>
-          </a:bodyPr>
-          <a:lstStyle/>
-          <a:p>
-            <a:pPr marL="177800" indent="-177800">
-              <a:spcAft>
-                <a:spcPts val="800"/>
-              </a:spcAft>
-              <a:buClr>
-                <a:srgbClr val="1F5FBF"/>
-              </a:buClr>
-              <a:buFont typeface="+mj-lt"/>
-              <a:buChar char="•"/>
-            </a:pPr>
-            <a:r>
-              <a:rPr lang="es-ES" sz="1350">
-                <a:solidFill>
-                  <a:srgbClr val="17212F"/>
-                </a:solidFill>
-                <a:latin typeface="Calibri" panose="020F0502020204030204" pitchFamily="34" charset="0"/>
-              </a:rPr>
-              <a:t>Ensayos de tracción en piso duro y arena: tiro en barra y corriente en simultáneo</a:t>
-            </a:r>
-          </a:p>
-          <a:p>
-            <a:pPr marL="177800" indent="-177800">
-              <a:spcAft>
-                <a:spcPts val="800"/>
-              </a:spcAft>
-              <a:buClr>
-                <a:srgbClr val="1F5FBF"/>
-              </a:buClr>
-              <a:buFont typeface="+mj-lt"/>
-              <a:buChar char="•"/>
-            </a:pPr>
-            <a:r>
-              <a:rPr lang="es-ES" sz="1350">
-                <a:solidFill>
-                  <a:srgbClr val="17212F"/>
-                </a:solidFill>
-                <a:latin typeface="Calibri" panose="020F0502020204030204" pitchFamily="34" charset="0"/>
-              </a:rPr>
-              <a:t>Ajustar las ruedas del modelo a la escala final</a:t>
-            </a:r>
-          </a:p>
-          <a:p>
-            <a:pPr marL="177800" indent="-177800">
-              <a:spcAft>
-                <a:spcPts val="800"/>
-              </a:spcAft>
-              <a:buClr>
-                <a:srgbClr val="1F5FBF"/>
-              </a:buClr>
-              <a:buFont typeface="+mj-lt"/>
-              <a:buChar char="•"/>
-            </a:pPr>
-            <a:r>
-              <a:rPr lang="es-ES" sz="1350">
-                <a:solidFill>
-                  <a:srgbClr val="17212F"/>
-                </a:solidFill>
-                <a:latin typeface="Calibri" panose="020F0502020204030204" pitchFamily="34" charset="0"/>
-              </a:rPr>
-              <a:t>Medir la altura del centro de masa</a:t>
-            </a:r>
-            <a:endParaRPr lang="en-US" sz="1350">
-              <a:solidFill>
-                <a:srgbClr val="17212F"/>
-              </a:solidFill>
-              <a:latin typeface="Calibri" panose="020F0502020204030204" pitchFamily="34" charset="0"/>
-            </a:endParaRPr>
-          </a:p>
-        </p:txBody>
-      </p:sp>
-      <p:sp>
-        <p:nvSpPr>
-          <p:cNvPr id="12" name="Rectángulo: esquinas redondeadas 11">
-            <a:extLst>
-              <a:ext uri="{FF2B5EF4-FFF2-40B4-BE49-F238E27FC236}">
-                <a16:creationId xmlns:a16="http://schemas.microsoft.com/office/drawing/2014/main" id="{422874BC-52D5-4023-8479-587F5086EE7F}"/>
-              </a:ext>
-            </a:extLst>
-          </p:cNvPr>
-          <p:cNvSpPr/>
-          <p:nvPr/>
-        </p:nvSpPr>
-        <p:spPr>
-          <a:xfrm>
-            <a:off x="8077200" y="1498600"/>
-            <a:ext cx="3505200" cy="4267200"/>
-          </a:xfrm>
-          <a:prstGeom prst="roundRect">
-            <a:avLst>
-              <a:gd name="adj" fmla="val 5000"/>
-            </a:avLst>
-          </a:prstGeom>
-          <a:solidFill>
-            <a:srgbClr val="F1F3F7"/>
-          </a:solidFill>
-          <a:ln w="12700" cap="flat" cmpd="sng" algn="ctr">
-            <a:noFill/>
-            <a:prstDash val="solid"/>
-            <a:miter lim="800000"/>
-          </a:ln>
-          <a:effectLst/>
-          <a:extLst>
-            <a:ext uri="{91240B29-F687-4F45-9708-019B960494DF}">
-              <a14:hiddenLine xmlns:a14="http://schemas.microsoft.com/office/drawing/2010/main" w="12700" cap="flat" cmpd="sng" algn="ctr">
-                <a:solidFill>
-                  <a:schemeClr val="accent1">
-                    <a:shade val="50000"/>
-                  </a:schemeClr>
-                </a:solidFill>
-                <a:prstDash val="solid"/>
-                <a:miter lim="800000"/>
-              </a14:hiddenLine>
-            </a:ext>
-          </a:extLst>
-        </p:spPr>
-        <p:style>
-          <a:lnRef idx="2">
-            <a:schemeClr val="accent1">
-              <a:shade val="50000"/>
-            </a:schemeClr>
-          </a:lnRef>
-          <a:fillRef idx="1">
-            <a:schemeClr val="accent1"/>
-          </a:fillRef>
-          <a:effectRef idx="0">
-            <a:schemeClr val="accent1"/>
-          </a:effectRef>
-          <a:fontRef idx="minor">
-            <a:schemeClr val="lt1"/>
-          </a:fontRef>
-        </p:style>
-        <p:txBody>
-          <a:bodyPr rtlCol="0" anchor="ctr"/>
-          <a:lstStyle/>
-          <a:p>
-            <a:pPr algn="ctr"/>
-            <a:endParaRPr lang="en-US"/>
-          </a:p>
-        </p:txBody>
-      </p:sp>
-      <p:sp>
-        <p:nvSpPr>
-          <p:cNvPr id="13" name="Rectángulo: esquinas redondeadas 12">
-            <a:extLst>
-              <a:ext uri="{FF2B5EF4-FFF2-40B4-BE49-F238E27FC236}">
-                <a16:creationId xmlns:a16="http://schemas.microsoft.com/office/drawing/2014/main" id="{6FDEB2C1-5C27-4F88-878C-EDCA3661FB25}"/>
-              </a:ext>
-            </a:extLst>
-          </p:cNvPr>
-          <p:cNvSpPr/>
-          <p:nvPr/>
-        </p:nvSpPr>
-        <p:spPr>
-          <a:xfrm>
-            <a:off x="8331200" y="1727200"/>
-            <a:ext cx="1143000" cy="279400"/>
-          </a:xfrm>
-          <a:prstGeom prst="roundRect">
-            <a:avLst>
-              <a:gd name="adj" fmla="val 50000"/>
-            </a:avLst>
-          </a:prstGeom>
-          <a:solidFill>
-            <a:srgbClr val="0B1F3A"/>
-          </a:solidFill>
-          <a:ln w="12700" cap="flat" cmpd="sng" algn="ctr">
-            <a:noFill/>
-            <a:prstDash val="solid"/>
-            <a:miter lim="800000"/>
-          </a:ln>
-          <a:effectLst/>
-          <a:extLst>
-            <a:ext uri="{91240B29-F687-4F45-9708-019B960494DF}">
-              <a14:hiddenLine xmlns:a14="http://schemas.microsoft.com/office/drawing/2010/main" w="12700" cap="flat" cmpd="sng" algn="ctr">
-                <a:solidFill>
-                  <a:schemeClr val="accent1">
-                    <a:shade val="50000"/>
-                  </a:schemeClr>
-                </a:solidFill>
-                <a:prstDash val="solid"/>
-                <a:miter lim="800000"/>
-              </a14:hiddenLine>
-            </a:ext>
-          </a:extLst>
-        </p:spPr>
-        <p:style>
-          <a:lnRef idx="2">
-            <a:schemeClr val="accent1">
-              <a:shade val="50000"/>
-            </a:schemeClr>
-          </a:lnRef>
-          <a:fillRef idx="1">
-            <a:schemeClr val="accent1"/>
-          </a:fillRef>
-          <a:effectRef idx="0">
-            <a:schemeClr val="accent1"/>
-          </a:effectRef>
-          <a:fontRef idx="minor">
-            <a:schemeClr val="lt1"/>
-          </a:fontRef>
-        </p:style>
-        <p:txBody>
-          <a:bodyPr lIns="50800" tIns="50800" rIns="50800" bIns="50800" rtlCol="0" anchor="ctr"/>
-          <a:lstStyle/>
-          <a:p>
-            <a:pPr algn="ctr"/>
-            <a:r>
-              <a:rPr lang="en-US" sz="1100" b="1">
-                <a:solidFill>
-                  <a:srgbClr val="FFFFFF"/>
-                </a:solidFill>
-                <a:latin typeface="Arial" panose="020B0604020202020204" pitchFamily="34" charset="0"/>
-              </a:rPr>
-              <a:t>DESPUÉS</a:t>
-            </a:r>
-          </a:p>
-        </p:txBody>
-      </p:sp>
-      <p:sp>
-        <p:nvSpPr>
-          <p:cNvPr id="14" name="CuadroTexto 13">
-            <a:extLst>
-              <a:ext uri="{FF2B5EF4-FFF2-40B4-BE49-F238E27FC236}">
-                <a16:creationId xmlns:a16="http://schemas.microsoft.com/office/drawing/2014/main" id="{6339E157-A485-47FD-A315-35B468B15615}"/>
-              </a:ext>
-            </a:extLst>
-          </p:cNvPr>
-          <p:cNvSpPr txBox="1"/>
-          <p:nvPr/>
-        </p:nvSpPr>
-        <p:spPr>
-          <a:xfrm>
-            <a:off x="8331200" y="2159000"/>
-            <a:ext cx="2997200" cy="304800"/>
-          </a:xfrm>
-          <a:prstGeom prst="rect">
-            <a:avLst/>
-          </a:prstGeom>
-          <a:noFill/>
-        </p:spPr>
-        <p:txBody>
-          <a:bodyPr vert="horz" wrap="square" lIns="0" tIns="0" rIns="0" bIns="0" rtlCol="0" anchor="t">
-            <a:noAutofit/>
-          </a:bodyPr>
-          <a:lstStyle/>
-          <a:p>
-            <a:r>
-              <a:rPr lang="en-US" sz="1700" b="1">
-                <a:solidFill>
-                  <a:srgbClr val="17212F"/>
-                </a:solidFill>
-                <a:latin typeface="Arial" panose="020B0604020202020204" pitchFamily="34" charset="0"/>
-              </a:rPr>
-              <a:t>Rover final</a:t>
-            </a:r>
-          </a:p>
-        </p:txBody>
-      </p:sp>
-      <p:sp>
-        <p:nvSpPr>
-          <p:cNvPr id="15" name="CuadroTexto 14">
-            <a:extLst>
-              <a:ext uri="{FF2B5EF4-FFF2-40B4-BE49-F238E27FC236}">
-                <a16:creationId xmlns:a16="http://schemas.microsoft.com/office/drawing/2014/main" id="{F7EA31D5-E3D4-4055-A51C-7308BD03E059}"/>
-              </a:ext>
-            </a:extLst>
-          </p:cNvPr>
-          <p:cNvSpPr txBox="1"/>
-          <p:nvPr/>
-        </p:nvSpPr>
-        <p:spPr>
-          <a:xfrm>
-            <a:off x="8331200" y="2616200"/>
-            <a:ext cx="2997200" cy="3048000"/>
-          </a:xfrm>
-          <a:prstGeom prst="rect">
-            <a:avLst/>
-          </a:prstGeom>
-          <a:noFill/>
-        </p:spPr>
-        <p:txBody>
-          <a:bodyPr vert="horz" wrap="square" lIns="0" tIns="0" rIns="0" bIns="0" rtlCol="0" anchor="t">
-            <a:noAutofit/>
-          </a:bodyPr>
-          <a:lstStyle/>
-          <a:p>
-            <a:pPr marL="177800" indent="-177800">
-              <a:spcAft>
-                <a:spcPts val="800"/>
-              </a:spcAft>
-              <a:buClr>
-                <a:srgbClr val="0B1F3A"/>
-              </a:buClr>
-              <a:buFont typeface="+mj-lt"/>
-              <a:buChar char="•"/>
-            </a:pPr>
-            <a:r>
-              <a:rPr lang="es-ES" sz="1350">
-                <a:solidFill>
-                  <a:srgbClr val="17212F"/>
-                </a:solidFill>
-                <a:latin typeface="Calibri" panose="020F0502020204030204" pitchFamily="34" charset="0"/>
-              </a:rPr>
-              <a:t>Elegir el motor de tracción</a:t>
-            </a:r>
-          </a:p>
-          <a:p>
-            <a:pPr marL="177800" indent="-177800">
-              <a:spcAft>
-                <a:spcPts val="800"/>
-              </a:spcAft>
-              <a:buClr>
-                <a:srgbClr val="0B1F3A"/>
-              </a:buClr>
-              <a:buFont typeface="+mj-lt"/>
-              <a:buChar char="•"/>
-            </a:pPr>
-            <a:r>
-              <a:rPr lang="es-ES" sz="1350">
-                <a:solidFill>
-                  <a:srgbClr val="17212F"/>
-                </a:solidFill>
-                <a:latin typeface="Calibri" panose="020F0502020204030204" pitchFamily="34" charset="0"/>
-              </a:rPr>
-              <a:t>Presupuesto de corriente de todo el rover</a:t>
-            </a:r>
-          </a:p>
-          <a:p>
-            <a:pPr marL="177800" indent="-177800">
-              <a:spcAft>
-                <a:spcPts val="800"/>
-              </a:spcAft>
-              <a:buClr>
-                <a:srgbClr val="0B1F3A"/>
-              </a:buClr>
-              <a:buFont typeface="+mj-lt"/>
-              <a:buChar char="•"/>
-            </a:pPr>
-            <a:r>
-              <a:rPr lang="es-ES" sz="1350">
-                <a:solidFill>
-                  <a:srgbClr val="17212F"/>
-                </a:solidFill>
-                <a:latin typeface="Calibri" panose="020F0502020204030204" pitchFamily="34" charset="0"/>
-              </a:rPr>
-              <a:t>Batería, PDB y cableado del rover final</a:t>
-            </a:r>
-            <a:endParaRPr lang="en-US" sz="1350">
-              <a:solidFill>
-                <a:srgbClr val="17212F"/>
-              </a:solidFill>
-              <a:latin typeface="Calibri" panose="020F0502020204030204" pitchFamily="34" charset="0"/>
-            </a:endParaRPr>
-          </a:p>
-        </p:txBody>
-      </p:sp>
-      <p:sp>
-        <p:nvSpPr>
-          <p:cNvPr id="16" name="CuadroTexto 15">
-            <a:extLst>
-              <a:ext uri="{FF2B5EF4-FFF2-40B4-BE49-F238E27FC236}">
-                <a16:creationId xmlns:a16="http://schemas.microsoft.com/office/drawing/2014/main" id="{1365CB8F-2733-4009-872A-3B533D91077E}"/>
-              </a:ext>
-            </a:extLst>
-          </p:cNvPr>
-          <p:cNvSpPr txBox="1"/>
-          <p:nvPr/>
-        </p:nvSpPr>
-        <p:spPr>
-          <a:xfrm>
-            <a:off x="609600" y="5943599"/>
-            <a:ext cx="9906000" cy="457200"/>
-          </a:xfrm>
-          <a:prstGeom prst="rect">
-            <a:avLst/>
-          </a:prstGeom>
-          <a:noFill/>
-        </p:spPr>
-        <p:txBody>
-          <a:bodyPr vert="horz" wrap="square" lIns="0" tIns="0" rIns="0" bIns="0" rtlCol="0" anchor="t">
-            <a:noAutofit/>
-          </a:bodyPr>
-          <a:lstStyle/>
-          <a:p>
-            <a:r>
-              <a:rPr lang="es-ES" sz="1300" i="1" dirty="0">
-                <a:solidFill>
-                  <a:srgbClr val="5A6B80"/>
-                </a:solidFill>
-                <a:latin typeface="Calibri" panose="020F0502020204030204" pitchFamily="34" charset="0"/>
-              </a:rPr>
-              <a:t>Algunos datos los esperamos de Locomoción y Chasis; mientras tanto avanzamos con todo lo que no depende de ellos.</a:t>
-            </a:r>
-            <a:endParaRPr lang="en-US" sz="1300" i="1" dirty="0">
+              <a:t>Algunas cosas las esperamos de Locomoción y Chasis; mientras tanto avanzamos con todo lo que no depende de ellos.</a:t>
+            </a:r>
+            <a:endParaRPr lang="en-US" sz="1400" i="1" dirty="0">
               <a:solidFill>
                 <a:srgbClr val="5A6B80"/>
               </a:solidFill>
@@ -13387,8 +13173,8 @@
         </p:nvSpPr>
         <p:spPr>
           <a:xfrm>
-            <a:off x="609600" y="5588000"/>
-            <a:ext cx="3556000" cy="508000"/>
+            <a:off x="3840480" y="5791200"/>
+            <a:ext cx="4124960" cy="508000"/>
           </a:xfrm>
           <a:prstGeom prst="roundRect">
             <a:avLst>
@@ -13440,175 +13226,40 @@
           <a:p>
             <a:pPr algn="ctr"/>
             <a:r>
-              <a:rPr lang="en-US" sz="1300" b="1">
+              <a:rPr lang="en-US" sz="1600" b="1" dirty="0" err="1">
                 <a:solidFill>
                   <a:srgbClr val="17212F"/>
                 </a:solidFill>
                 <a:latin typeface="Calibri" panose="020F0502020204030204" pitchFamily="34" charset="0"/>
               </a:rPr>
-              <a:t>Primera reunión: [completar]</a:t>
-            </a:r>
-          </a:p>
-        </p:txBody>
-      </p:sp>
-      <p:sp>
-        <p:nvSpPr>
-          <p:cNvPr id="28" name="Rectángulo: esquinas redondeadas 27">
-            <a:extLst>
-              <a:ext uri="{FF2B5EF4-FFF2-40B4-BE49-F238E27FC236}">
-                <a16:creationId xmlns:a16="http://schemas.microsoft.com/office/drawing/2014/main" id="{961C3DD2-5476-4854-ADDE-830909B3CA61}"/>
-              </a:ext>
-            </a:extLst>
-          </p:cNvPr>
-          <p:cNvSpPr/>
-          <p:nvPr/>
-        </p:nvSpPr>
-        <p:spPr>
-          <a:xfrm>
-            <a:off x="4318000" y="5588000"/>
-            <a:ext cx="3556000" cy="508000"/>
-          </a:xfrm>
-          <a:prstGeom prst="roundRect">
-            <a:avLst>
-              <a:gd name="adj" fmla="val 20000"/>
-            </a:avLst>
-          </a:prstGeom>
-          <a:solidFill>
-            <a:srgbClr val="FFE27A"/>
-          </a:solidFill>
-          <a:ln w="12700" cap="flat" cmpd="sng" algn="ctr">
-            <a:noFill/>
-            <a:prstDash val="solid"/>
-            <a:miter lim="800000"/>
-          </a:ln>
-          <a:effectLst/>
-          <a:extLst>
-            <a:ext uri="{91240B29-F687-4F45-9708-019B960494DF}">
-              <a14:hiddenLine xmlns:a14="http://schemas.microsoft.com/office/drawing/2010/main" w="12700" cap="flat" cmpd="sng" algn="ctr">
-                <a:solidFill>
-                  <a:schemeClr val="accent1">
-                    <a:shade val="50000"/>
-                  </a:schemeClr>
-                </a:solidFill>
-                <a:prstDash val="solid"/>
-                <a:miter lim="800000"/>
-              </a14:hiddenLine>
-            </a:ext>
-          </a:extLst>
-        </p:spPr>
-        <p:style>
-          <a:lnRef idx="2">
-            <a:schemeClr val="accent1">
-              <a:shade val="50000"/>
-            </a:schemeClr>
-          </a:lnRef>
-          <a:fillRef idx="1">
-            <a:schemeClr val="accent1"/>
-          </a:fillRef>
-          <a:effectRef idx="0">
-            <a:schemeClr val="accent1"/>
-          </a:effectRef>
-          <a:fontRef idx="minor">
-            <a:schemeClr val="lt1"/>
-          </a:fontRef>
-        </p:style>
-        <p:txBody>
-          <a:bodyPr lIns="127000" tIns="50800" rIns="127000" bIns="50800" rtlCol="0" anchor="ctr"/>
-          <a:lstStyle/>
-          <a:p>
-            <a:pPr algn="ctr"/>
-            <a:r>
-              <a:rPr lang="pt-BR" sz="1300" b="1">
+              <a:t>Organizar</a:t>
+            </a:r>
+            <a:r>
+              <a:rPr lang="en-US" sz="1600" b="1" dirty="0">
                 <a:solidFill>
                   <a:srgbClr val="17212F"/>
                 </a:solidFill>
                 <a:latin typeface="Calibri" panose="020F0502020204030204" pitchFamily="34" charset="0"/>
               </a:rPr>
-              <a:t>Doc de tareas: [completar link]</a:t>
-            </a:r>
-            <a:endParaRPr lang="en-US" sz="1300" b="1">
-              <a:solidFill>
-                <a:srgbClr val="17212F"/>
-              </a:solidFill>
-              <a:latin typeface="Calibri" panose="020F0502020204030204" pitchFamily="34" charset="0"/>
-            </a:endParaRPr>
-          </a:p>
-        </p:txBody>
-      </p:sp>
-      <p:sp>
-        <p:nvSpPr>
-          <p:cNvPr id="29" name="Rectángulo: esquinas redondeadas 28">
-            <a:extLst>
-              <a:ext uri="{FF2B5EF4-FFF2-40B4-BE49-F238E27FC236}">
-                <a16:creationId xmlns:a16="http://schemas.microsoft.com/office/drawing/2014/main" id="{0CDC0593-DEB1-4534-A386-6D15C8FC9A9B}"/>
-              </a:ext>
-            </a:extLst>
-          </p:cNvPr>
-          <p:cNvSpPr/>
-          <p:nvPr/>
-        </p:nvSpPr>
-        <p:spPr>
-          <a:xfrm>
-            <a:off x="8026400" y="5588000"/>
-            <a:ext cx="3556000" cy="508000"/>
-          </a:xfrm>
-          <a:prstGeom prst="roundRect">
-            <a:avLst>
-              <a:gd name="adj" fmla="val 20000"/>
-            </a:avLst>
-          </a:prstGeom>
-          <a:solidFill>
-            <a:srgbClr val="FFE27A"/>
-          </a:solidFill>
-          <a:ln w="12700" cap="flat" cmpd="sng" algn="ctr">
-            <a:noFill/>
-            <a:prstDash val="solid"/>
-            <a:miter lim="800000"/>
-          </a:ln>
-          <a:effectLst/>
-          <a:extLst>
-            <a:ext uri="{91240B29-F687-4F45-9708-019B960494DF}">
-              <a14:hiddenLine xmlns:a14="http://schemas.microsoft.com/office/drawing/2010/main" w="12700" cap="flat" cmpd="sng" algn="ctr">
-                <a:solidFill>
-                  <a:schemeClr val="accent1">
-                    <a:shade val="50000"/>
-                  </a:schemeClr>
-                </a:solidFill>
-                <a:prstDash val="solid"/>
-                <a:miter lim="800000"/>
-              </a14:hiddenLine>
-            </a:ext>
-          </a:extLst>
-        </p:spPr>
-        <p:style>
-          <a:lnRef idx="2">
-            <a:schemeClr val="accent1">
-              <a:shade val="50000"/>
-            </a:schemeClr>
-          </a:lnRef>
-          <a:fillRef idx="1">
-            <a:schemeClr val="accent1"/>
-          </a:fillRef>
-          <a:effectRef idx="0">
-            <a:schemeClr val="accent1"/>
-          </a:effectRef>
-          <a:fontRef idx="minor">
-            <a:schemeClr val="lt1"/>
-          </a:fontRef>
-        </p:style>
-        <p:txBody>
-          <a:bodyPr lIns="127000" tIns="50800" rIns="127000" bIns="50800" rtlCol="0" anchor="ctr"/>
-          <a:lstStyle/>
-          <a:p>
-            <a:pPr algn="ctr"/>
-            <a:r>
-              <a:rPr lang="en-US" sz="1300" b="1">
+              <a:t> </a:t>
+            </a:r>
+            <a:r>
+              <a:rPr lang="en-US" sz="1600" b="1" dirty="0" err="1">
                 <a:solidFill>
                   <a:srgbClr val="17212F"/>
                 </a:solidFill>
                 <a:latin typeface="Calibri" panose="020F0502020204030204" pitchFamily="34" charset="0"/>
               </a:rPr>
-              <a:t>Acceso al repo: [completar]</a:t>
+              <a:t>reunión</a:t>
+            </a:r>
+            <a:r>
+              <a:rPr lang="en-US" sz="1600" b="1" dirty="0">
+                <a:solidFill>
+                  <a:srgbClr val="17212F"/>
+                </a:solidFill>
+                <a:latin typeface="Calibri" panose="020F0502020204030204" pitchFamily="34" charset="0"/>
+              </a:rPr>
+              <a:t> presencial</a:t>
             </a:r>
           </a:p>
         </p:txBody>
@@ -14507,25 +14158,7 @@
                 </a:solidFill>
                 <a:latin typeface="Calibri" panose="020F0502020204030204" pitchFamily="34" charset="0"/>
               </a:rPr>
-              <a:t>: </a:t>
-            </a:r>
-            <a:r>
-              <a:rPr lang="en-US" sz="1600" dirty="0" err="1">
-                <a:solidFill>
-                  <a:srgbClr val="FFFFFF"/>
-                </a:solidFill>
-                <a:latin typeface="Calibri" panose="020F0502020204030204" pitchFamily="34" charset="0"/>
-              </a:rPr>
-              <a:t>empiecen</a:t>
-            </a:r>
-            <a:r>
-              <a:rPr lang="en-US" sz="1600" dirty="0">
-                <a:solidFill>
-                  <a:srgbClr val="FFFFFF"/>
-                </a:solidFill>
-                <a:latin typeface="Calibri" panose="020F0502020204030204" pitchFamily="34" charset="0"/>
-              </a:rPr>
-              <a:t> por https://github.com/Matyy38/erc-rover-EyP/</a:t>
+              <a:t>: https://github.com/Matyy38/erc-rover-EyP/</a:t>
             </a:r>
           </a:p>
         </p:txBody>
